--- a/docs/education/Claude와-수업도구-만들기.pptx
+++ b/docs/education/Claude와-수업도구-만들기.pptx
@@ -133,7 +133,7 @@
   <p:extLst>
     <p:ext uri="{521415D9-36F7-43E2-AB2F-B90AF26B5E84}">
       <p14:sectionLst xmlns:p14="http://schemas.microsoft.com/office/powerpoint/2010/main">
-        <p14:section name="무엇을 만들었나" id="{94110c55-6ab7-b67b-0a73-5a9ca60fe7e7}">
+        <p14:section name="무엇을 만들었나" id="{5cb2e954-978f-a4b6-11cb-083cc3451da2}">
           <p14:sldIdLst>
             <p14:sldId id="256"/>
             <p14:sldId id="257"/>
@@ -142,7 +142,7 @@
             <p14:sldId id="260"/>
           </p14:sldIdLst>
         </p14:section>
-        <p14:section name="다섯 단계" id="{482836ec-a13c-d4b0-224d-6daabaed9d41}">
+        <p14:section name="다섯 단계" id="{440b7978-6d1c-c844-309d-0df0dbc45b4b}">
           <p14:sldIdLst>
             <p14:sldId id="261"/>
             <p14:sldId id="262"/>
@@ -157,7 +157,7 @@
             <p14:sldId id="271"/>
           </p14:sldIdLst>
         </p14:section>
-        <p14:section name="바로 쓰는 틀" id="{31ee19af-f46e-82ec-0b0e-458e82cae9d1}">
+        <p14:section name="바로 쓰는 틀" id="{486f90dd-8d4c-6a5c-1571-1b58b3201e55}">
           <p14:sldIdLst>
             <p14:sldId id="272"/>
             <p14:sldId id="273"/>
@@ -167,7 +167,7 @@
             <p14:sldId id="277"/>
           </p14:sldIdLst>
         </p14:section>
-        <p14:section name="직접 해보기" id="{2283bb3d-9027-5148-a6a0-8df0b287121e}">
+        <p14:section name="직접 해보기" id="{bc923112-ffad-2e89-1b4e-04c29caffec5}">
           <p14:sldIdLst>
             <p14:sldId id="278"/>
             <p14:sldId id="279"/>
@@ -8042,7 +8042,7 @@
         </p:nvSpPr>
         <p:spPr>
           <a:xfrm>
-            <a:off x="5760720" y="2761488"/>
+            <a:off x="5760720" y="2715768"/>
             <a:ext cx="347472" cy="347472"/>
           </a:xfrm>
           <a:prstGeom prst="ellipse">
@@ -8067,7 +8067,7 @@
         </p:nvSpPr>
         <p:spPr>
           <a:xfrm>
-            <a:off x="5760720" y="2761488"/>
+            <a:off x="5760720" y="2715768"/>
             <a:ext cx="347472" cy="347472"/>
           </a:xfrm>
           <a:prstGeom prst="rect">
@@ -8103,8 +8103,8 @@
         </p:nvSpPr>
         <p:spPr>
           <a:xfrm>
-            <a:off x="6263640" y="2743200"/>
-            <a:ext cx="5349240" cy="768096"/>
+            <a:off x="6263640" y="2697480"/>
+            <a:ext cx="5349240" cy="713232"/>
           </a:xfrm>
           <a:prstGeom prst="rect">
             <a:avLst/>
@@ -8159,7 +8159,7 @@
         </p:nvSpPr>
         <p:spPr>
           <a:xfrm>
-            <a:off x="5760720" y="3566160"/>
+            <a:off x="5760720" y="3465576"/>
             <a:ext cx="347472" cy="347472"/>
           </a:xfrm>
           <a:prstGeom prst="ellipse">
@@ -8184,7 +8184,7 @@
         </p:nvSpPr>
         <p:spPr>
           <a:xfrm>
-            <a:off x="5760720" y="3566160"/>
+            <a:off x="5760720" y="3465576"/>
             <a:ext cx="347472" cy="347472"/>
           </a:xfrm>
           <a:prstGeom prst="rect">
@@ -8220,8 +8220,8 @@
         </p:nvSpPr>
         <p:spPr>
           <a:xfrm>
-            <a:off x="6263640" y="3547872"/>
-            <a:ext cx="5349240" cy="768096"/>
+            <a:off x="6263640" y="3447288"/>
+            <a:ext cx="5349240" cy="713232"/>
           </a:xfrm>
           <a:prstGeom prst="rect">
             <a:avLst/>
@@ -8276,7 +8276,7 @@
         </p:nvSpPr>
         <p:spPr>
           <a:xfrm>
-            <a:off x="5760720" y="4370832"/>
+            <a:off x="5760720" y="4215384"/>
             <a:ext cx="347472" cy="347472"/>
           </a:xfrm>
           <a:prstGeom prst="ellipse">
@@ -8301,7 +8301,7 @@
         </p:nvSpPr>
         <p:spPr>
           <a:xfrm>
-            <a:off x="5760720" y="4370832"/>
+            <a:off x="5760720" y="4215384"/>
             <a:ext cx="347472" cy="347472"/>
           </a:xfrm>
           <a:prstGeom prst="rect">
@@ -8337,8 +8337,8 @@
         </p:nvSpPr>
         <p:spPr>
           <a:xfrm>
-            <a:off x="6263640" y="4352544"/>
-            <a:ext cx="5349240" cy="768096"/>
+            <a:off x="6263640" y="4197096"/>
+            <a:ext cx="5349240" cy="713232"/>
           </a:xfrm>
           <a:prstGeom prst="rect">
             <a:avLst/>
@@ -8393,7 +8393,7 @@
         </p:nvSpPr>
         <p:spPr>
           <a:xfrm>
-            <a:off x="5760720" y="5175504"/>
+            <a:off x="5760720" y="4965192"/>
             <a:ext cx="347472" cy="347472"/>
           </a:xfrm>
           <a:prstGeom prst="ellipse">
@@ -8418,7 +8418,7 @@
         </p:nvSpPr>
         <p:spPr>
           <a:xfrm>
-            <a:off x="5760720" y="5175504"/>
+            <a:off x="5760720" y="4965192"/>
             <a:ext cx="347472" cy="347472"/>
           </a:xfrm>
           <a:prstGeom prst="rect">
@@ -8454,8 +8454,8 @@
         </p:nvSpPr>
         <p:spPr>
           <a:xfrm>
-            <a:off x="6263640" y="5157216"/>
-            <a:ext cx="5349240" cy="768096"/>
+            <a:off x="6263640" y="4946904"/>
+            <a:ext cx="5349240" cy="713232"/>
           </a:xfrm>
           <a:prstGeom prst="rect">
             <a:avLst/>
@@ -8510,12 +8510,12 @@
         </p:nvSpPr>
         <p:spPr>
           <a:xfrm>
-            <a:off x="5760720" y="6035040"/>
-            <a:ext cx="5852160" cy="0"/>
+            <a:off x="5760720" y="5760720"/>
+            <a:ext cx="5852160" cy="566928"/>
           </a:xfrm>
           <a:prstGeom prst="roundRect">
             <a:avLst>
-              <a:gd name="adj" fmla="val Infinity"/>
+              <a:gd name="adj" fmla="val 12903"/>
             </a:avLst>
           </a:prstGeom>
           <a:solidFill>
@@ -8537,8 +8537,8 @@
         </p:nvSpPr>
         <p:spPr>
           <a:xfrm>
-            <a:off x="5961888" y="6035040"/>
-            <a:ext cx="5449824" cy="0"/>
+            <a:off x="5961888" y="5760720"/>
+            <a:ext cx="5449824" cy="566928"/>
           </a:xfrm>
           <a:prstGeom prst="rect">
             <a:avLst/>
